--- a/Reporte 271026.pptx
+++ b/Reporte 271026.pptx
@@ -6574,10 +6574,10 @@
       </p:sp>
       <p:pic>
         <p:nvPicPr>
-          <p:cNvPr id="5" name="Imagen 4">
+          <p:cNvPr id="4" name="Imagen 3">
             <a:extLst>
               <a:ext uri="{FF2B5EF4-FFF2-40B4-BE49-F238E27FC236}">
-                <a16:creationId xmlns:a16="http://schemas.microsoft.com/office/drawing/2014/main" id="{647EBF48-DC66-73F1-4E90-E3963F6ADDB6}"/>
+                <a16:creationId xmlns:a16="http://schemas.microsoft.com/office/drawing/2014/main" id="{970A6C15-3ABE-7D8A-C594-CB2D0E42275F}"/>
               </a:ext>
             </a:extLst>
           </p:cNvPr>
@@ -6594,8 +6594,8 @@
         </p:blipFill>
         <p:spPr>
           <a:xfrm>
-            <a:off x="-6725" y="869654"/>
-            <a:ext cx="9144000" cy="3547068"/>
+            <a:off x="0" y="862962"/>
+            <a:ext cx="9144000" cy="3560451"/>
           </a:xfrm>
           <a:prstGeom prst="rect">
             <a:avLst/>
@@ -6680,10 +6680,10 @@
       </p:sp>
       <p:pic>
         <p:nvPicPr>
-          <p:cNvPr id="4" name="Imagen 3">
+          <p:cNvPr id="3" name="Imagen 2">
             <a:extLst>
               <a:ext uri="{FF2B5EF4-FFF2-40B4-BE49-F238E27FC236}">
-                <a16:creationId xmlns:a16="http://schemas.microsoft.com/office/drawing/2014/main" id="{716517F0-BE9A-3088-7796-154742F32B2E}"/>
+                <a16:creationId xmlns:a16="http://schemas.microsoft.com/office/drawing/2014/main" id="{C500061D-2F37-E1A2-EED5-C6FC2669420B}"/>
               </a:ext>
             </a:extLst>
           </p:cNvPr>
@@ -6700,8 +6700,8 @@
         </p:blipFill>
         <p:spPr>
           <a:xfrm>
-            <a:off x="-6725" y="1334400"/>
-            <a:ext cx="9144000" cy="2617576"/>
+            <a:off x="-6725" y="1327920"/>
+            <a:ext cx="9144000" cy="2630535"/>
           </a:xfrm>
           <a:prstGeom prst="rect">
             <a:avLst/>
@@ -6786,10 +6786,10 @@
       </p:sp>
       <p:pic>
         <p:nvPicPr>
-          <p:cNvPr id="5" name="Imagen 4">
+          <p:cNvPr id="4" name="Imagen 3">
             <a:extLst>
               <a:ext uri="{FF2B5EF4-FFF2-40B4-BE49-F238E27FC236}">
-                <a16:creationId xmlns:a16="http://schemas.microsoft.com/office/drawing/2014/main" id="{1E339A95-DDEE-0304-AADF-ED3E3CC06F9B}"/>
+                <a16:creationId xmlns:a16="http://schemas.microsoft.com/office/drawing/2014/main" id="{85A6ED94-6D09-AC0E-5DC2-7EA6E10CAFBB}"/>
               </a:ext>
             </a:extLst>
           </p:cNvPr>
@@ -6806,8 +6806,8 @@
         </p:blipFill>
         <p:spPr>
           <a:xfrm>
-            <a:off x="0" y="755103"/>
-            <a:ext cx="9144000" cy="3776169"/>
+            <a:off x="0" y="696757"/>
+            <a:ext cx="9144000" cy="3892861"/>
           </a:xfrm>
           <a:prstGeom prst="rect">
             <a:avLst/>
@@ -6892,10 +6892,10 @@
       </p:sp>
       <p:pic>
         <p:nvPicPr>
-          <p:cNvPr id="4" name="Imagen 3">
+          <p:cNvPr id="3" name="Imagen 2">
             <a:extLst>
               <a:ext uri="{FF2B5EF4-FFF2-40B4-BE49-F238E27FC236}">
-                <a16:creationId xmlns:a16="http://schemas.microsoft.com/office/drawing/2014/main" id="{6BBACC4A-46CE-D641-187D-D71DE378FF1E}"/>
+                <a16:creationId xmlns:a16="http://schemas.microsoft.com/office/drawing/2014/main" id="{FDBA68E6-4432-AA1D-43BA-5049F296AEF9}"/>
               </a:ext>
             </a:extLst>
           </p:cNvPr>
@@ -6912,8 +6912,8 @@
         </p:blipFill>
         <p:spPr>
           <a:xfrm>
-            <a:off x="0" y="1171796"/>
-            <a:ext cx="9144000" cy="2799907"/>
+            <a:off x="0" y="1286660"/>
+            <a:ext cx="9144000" cy="2713055"/>
           </a:xfrm>
           <a:prstGeom prst="rect">
             <a:avLst/>
@@ -7004,10 +7004,10 @@
       </p:sp>
       <p:pic>
         <p:nvPicPr>
-          <p:cNvPr id="3" name="Imagen 2">
+          <p:cNvPr id="4" name="Imagen 3">
             <a:extLst>
               <a:ext uri="{FF2B5EF4-FFF2-40B4-BE49-F238E27FC236}">
-                <a16:creationId xmlns:a16="http://schemas.microsoft.com/office/drawing/2014/main" id="{0ED74E42-F6DC-EE30-72DD-2FC160C055A9}"/>
+                <a16:creationId xmlns:a16="http://schemas.microsoft.com/office/drawing/2014/main" id="{67B43830-2964-BF28-8D73-C11C47779777}"/>
               </a:ext>
             </a:extLst>
           </p:cNvPr>
@@ -7024,8 +7024,8 @@
         </p:blipFill>
         <p:spPr>
           <a:xfrm>
-            <a:off x="0" y="1454518"/>
-            <a:ext cx="9144000" cy="2377340"/>
+            <a:off x="0" y="620909"/>
+            <a:ext cx="9144000" cy="4044558"/>
           </a:xfrm>
           <a:prstGeom prst="rect">
             <a:avLst/>
@@ -7116,10 +7116,10 @@
       </p:sp>
       <p:pic>
         <p:nvPicPr>
-          <p:cNvPr id="3" name="Imagen 2">
+          <p:cNvPr id="4" name="Imagen 3">
             <a:extLst>
               <a:ext uri="{FF2B5EF4-FFF2-40B4-BE49-F238E27FC236}">
-                <a16:creationId xmlns:a16="http://schemas.microsoft.com/office/drawing/2014/main" id="{0D5BE092-A531-9B88-0846-60AB9F1CEA06}"/>
+                <a16:creationId xmlns:a16="http://schemas.microsoft.com/office/drawing/2014/main" id="{0E80BF10-0269-EDC3-D87B-B609B70F9101}"/>
               </a:ext>
             </a:extLst>
           </p:cNvPr>
@@ -7136,8 +7136,8 @@
         </p:blipFill>
         <p:spPr>
           <a:xfrm>
-            <a:off x="2938001" y="395912"/>
-            <a:ext cx="3194974" cy="4747588"/>
+            <a:off x="2752725" y="542925"/>
+            <a:ext cx="3638550" cy="4057650"/>
           </a:xfrm>
           <a:prstGeom prst="rect">
             <a:avLst/>

--- a/Reporte 271026.pptx
+++ b/Reporte 271026.pptx
@@ -6574,10 +6574,10 @@
       </p:sp>
       <p:pic>
         <p:nvPicPr>
-          <p:cNvPr id="4" name="Imagen 3">
+          <p:cNvPr id="5" name="Imagen 4">
             <a:extLst>
               <a:ext uri="{FF2B5EF4-FFF2-40B4-BE49-F238E27FC236}">
-                <a16:creationId xmlns:a16="http://schemas.microsoft.com/office/drawing/2014/main" id="{970A6C15-3ABE-7D8A-C594-CB2D0E42275F}"/>
+                <a16:creationId xmlns:a16="http://schemas.microsoft.com/office/drawing/2014/main" id="{142C3E72-FC73-F61C-9E94-AFF84022B8CA}"/>
               </a:ext>
             </a:extLst>
           </p:cNvPr>
@@ -6594,8 +6594,8 @@
         </p:blipFill>
         <p:spPr>
           <a:xfrm>
-            <a:off x="0" y="862962"/>
-            <a:ext cx="9144000" cy="3560451"/>
+            <a:off x="0" y="784673"/>
+            <a:ext cx="9144000" cy="3574153"/>
           </a:xfrm>
           <a:prstGeom prst="rect">
             <a:avLst/>
@@ -6680,10 +6680,10 @@
       </p:sp>
       <p:pic>
         <p:nvPicPr>
-          <p:cNvPr id="3" name="Imagen 2">
+          <p:cNvPr id="4" name="Imagen 3">
             <a:extLst>
               <a:ext uri="{FF2B5EF4-FFF2-40B4-BE49-F238E27FC236}">
-                <a16:creationId xmlns:a16="http://schemas.microsoft.com/office/drawing/2014/main" id="{C500061D-2F37-E1A2-EED5-C6FC2669420B}"/>
+                <a16:creationId xmlns:a16="http://schemas.microsoft.com/office/drawing/2014/main" id="{2A4B6A63-23F5-22D8-F606-070C91072394}"/>
               </a:ext>
             </a:extLst>
           </p:cNvPr>
@@ -6700,8 +6700,8 @@
         </p:blipFill>
         <p:spPr>
           <a:xfrm>
-            <a:off x="-6725" y="1327920"/>
-            <a:ext cx="9144000" cy="2630535"/>
+            <a:off x="0" y="1365195"/>
+            <a:ext cx="9144000" cy="2657909"/>
           </a:xfrm>
           <a:prstGeom prst="rect">
             <a:avLst/>
@@ -6786,10 +6786,10 @@
       </p:sp>
       <p:pic>
         <p:nvPicPr>
-          <p:cNvPr id="4" name="Imagen 3">
+          <p:cNvPr id="5" name="Imagen 4">
             <a:extLst>
               <a:ext uri="{FF2B5EF4-FFF2-40B4-BE49-F238E27FC236}">
-                <a16:creationId xmlns:a16="http://schemas.microsoft.com/office/drawing/2014/main" id="{85A6ED94-6D09-AC0E-5DC2-7EA6E10CAFBB}"/>
+                <a16:creationId xmlns:a16="http://schemas.microsoft.com/office/drawing/2014/main" id="{22749F10-E8BE-0D85-1AB9-5F0D1B1383CB}"/>
               </a:ext>
             </a:extLst>
           </p:cNvPr>
@@ -6806,8 +6806,8 @@
         </p:blipFill>
         <p:spPr>
           <a:xfrm>
-            <a:off x="0" y="696757"/>
-            <a:ext cx="9144000" cy="3892861"/>
+            <a:off x="0" y="729991"/>
+            <a:ext cx="9144000" cy="3826393"/>
           </a:xfrm>
           <a:prstGeom prst="rect">
             <a:avLst/>
@@ -6892,10 +6892,10 @@
       </p:sp>
       <p:pic>
         <p:nvPicPr>
-          <p:cNvPr id="3" name="Imagen 2">
+          <p:cNvPr id="4" name="Imagen 3">
             <a:extLst>
               <a:ext uri="{FF2B5EF4-FFF2-40B4-BE49-F238E27FC236}">
-                <a16:creationId xmlns:a16="http://schemas.microsoft.com/office/drawing/2014/main" id="{FDBA68E6-4432-AA1D-43BA-5049F296AEF9}"/>
+                <a16:creationId xmlns:a16="http://schemas.microsoft.com/office/drawing/2014/main" id="{A8C7F621-C1E5-177C-79DE-8AB5AA43EB48}"/>
               </a:ext>
             </a:extLst>
           </p:cNvPr>
@@ -6912,8 +6912,8 @@
         </p:blipFill>
         <p:spPr>
           <a:xfrm>
-            <a:off x="0" y="1286660"/>
-            <a:ext cx="9144000" cy="2713055"/>
+            <a:off x="0" y="1268338"/>
+            <a:ext cx="9144000" cy="2749699"/>
           </a:xfrm>
           <a:prstGeom prst="rect">
             <a:avLst/>
@@ -7004,10 +7004,10 @@
       </p:sp>
       <p:pic>
         <p:nvPicPr>
-          <p:cNvPr id="4" name="Imagen 3">
+          <p:cNvPr id="3" name="Imagen 2">
             <a:extLst>
               <a:ext uri="{FF2B5EF4-FFF2-40B4-BE49-F238E27FC236}">
-                <a16:creationId xmlns:a16="http://schemas.microsoft.com/office/drawing/2014/main" id="{67B43830-2964-BF28-8D73-C11C47779777}"/>
+                <a16:creationId xmlns:a16="http://schemas.microsoft.com/office/drawing/2014/main" id="{15DA032E-0B02-25A7-4008-C59A608239CF}"/>
               </a:ext>
             </a:extLst>
           </p:cNvPr>
@@ -7024,8 +7024,8 @@
         </p:blipFill>
         <p:spPr>
           <a:xfrm>
-            <a:off x="0" y="620909"/>
-            <a:ext cx="9144000" cy="4044558"/>
+            <a:off x="0" y="634949"/>
+            <a:ext cx="9144000" cy="4016477"/>
           </a:xfrm>
           <a:prstGeom prst="rect">
             <a:avLst/>
@@ -7116,10 +7116,10 @@
       </p:sp>
       <p:pic>
         <p:nvPicPr>
-          <p:cNvPr id="4" name="Imagen 3">
+          <p:cNvPr id="3" name="Imagen 2">
             <a:extLst>
               <a:ext uri="{FF2B5EF4-FFF2-40B4-BE49-F238E27FC236}">
-                <a16:creationId xmlns:a16="http://schemas.microsoft.com/office/drawing/2014/main" id="{0E80BF10-0269-EDC3-D87B-B609B70F9101}"/>
+                <a16:creationId xmlns:a16="http://schemas.microsoft.com/office/drawing/2014/main" id="{74A235C1-4CD4-3975-CDD4-40E718B0F048}"/>
               </a:ext>
             </a:extLst>
           </p:cNvPr>
@@ -7136,8 +7136,8 @@
         </p:blipFill>
         <p:spPr>
           <a:xfrm>
-            <a:off x="2752725" y="542925"/>
-            <a:ext cx="3638550" cy="4057650"/>
+            <a:off x="0" y="924576"/>
+            <a:ext cx="9144000" cy="3437223"/>
           </a:xfrm>
           <a:prstGeom prst="rect">
             <a:avLst/>
